--- a/public/fun/pack/pptx/newspro/카드뉴스프리미엄_35_오늘의한마디_오닉스골드.pptx
+++ b/public/fun/pack/pptx/newspro/카드뉴스프리미엄_35_오늘의한마디_오닉스골드.pptx
@@ -113,12 +113,12 @@
   <p:extLst>
     <p:ext uri="{521415D9-36F7-43E2-AB2F-B90AF26B5E84}">
       <p14:sectionLst xmlns:p14="http://schemas.microsoft.com/office/powerpoint/2010/main">
-        <p14:section name="시작" id="{99AF81EC-E51E-4017-AD10-525FFFE80DA1}">
+        <p14:section name="시작" id="{639BB62B-D369-46F8-A1BD-0B2505EF7536}">
           <p14:sldIdLst>
             <p14:sldId id="256"/>
           </p14:sldIdLst>
         </p14:section>
-        <p14:section name="본문" id="{2079330B-0EF5-4CDF-AC40-5D73CA192FB5}">
+        <p14:section name="본문" id="{F6F5893F-11E4-445D-A7B1-36FD3252679B}">
           <p14:sldIdLst>
             <p14:sldId id="257"/>
             <p14:sldId id="258"/>
@@ -127,7 +127,7 @@
             <p14:sldId id="261"/>
           </p14:sldIdLst>
         </p14:section>
-        <p14:section name="마무리" id="{CCD35AE9-C03C-4A51-8346-3FD73AEAD60F}">
+        <p14:section name="마무리" id="{E5DF145C-D716-4220-A4CD-55A068F5894A}">
           <p14:sldIdLst>
             <p14:sldId id="262"/>
           </p14:sldIdLst>
@@ -1949,7 +1949,7 @@
             </a:lvl1pPr>
           </a:lstStyle>
           <a:p>
-            <a:fld id="{B026FFF6-5E90-4FA0-89FA-0A1BB0DD60F3}" type="slidenum">
+            <a:fld id="{964AB23D-ECC3-4441-8C04-B52A3DD02124}" type="slidenum">
               <a:rPr lang="en-US"/>
               <a:t>‹#›</a:t>
             </a:fld>
@@ -3061,7 +3061,7 @@
             </a:lvl1pPr>
           </a:lstStyle>
           <a:p>
-            <a:fld id="{52B86A41-30A2-4518-BC26-6EAD15A44A36}" type="slidenum">
+            <a:fld id="{847D0266-707A-4B7D-AFC6-C0E8C6DB0165}" type="slidenum">
               <a:rPr lang="en-US"/>
               <a:t>‹#›</a:t>
             </a:fld>
@@ -3745,7 +3745,7 @@
             </a:lvl1pPr>
           </a:lstStyle>
           <a:p>
-            <a:fld id="{9D96363F-DBDE-4528-A42A-1D36D18B592B}" type="slidenum">
+            <a:fld id="{5F3F57B3-8BC7-4C1C-BFEC-46D97733E7FF}" type="slidenum">
               <a:rPr lang="en-US"/>
               <a:t>‹#›</a:t>
             </a:fld>
@@ -4675,7 +4675,7 @@
           <a:bodyPr/>
           <a:lstStyle/>
           <a:p>
-            <a:fld id="{EB1FC16D-1B5A-407E-81E6-37923CFD61CE}" type="slidenum">
+            <a:fld id="{9D163C20-82B2-4247-BBA6-4BD623F49CC3}" type="slidenum">
               <a:rPr lang="en-US"/>
               <a:t>‹#›</a:t>
             </a:fld>
@@ -4841,7 +4841,7 @@
           <a:bodyPr/>
           <a:lstStyle/>
           <a:p>
-            <a:fld id="{18284AE4-239F-47FF-AF07-DAE367399187}" type="slidenum">
+            <a:fld id="{285FE2F1-9E12-43C1-9B28-6ACAF54D19EE}" type="slidenum">
               <a:rPr lang="en-US"/>
               <a:t>‹#›</a:t>
             </a:fld>
@@ -5007,7 +5007,7 @@
           <a:bodyPr/>
           <a:lstStyle/>
           <a:p>
-            <a:fld id="{4F489A5D-6361-4943-BB79-39BB1A75231D}" type="slidenum">
+            <a:fld id="{2D52F9FD-1062-4301-B803-9BB4D36839B6}" type="slidenum">
               <a:rPr lang="en-US"/>
               <a:t>‹#›</a:t>
             </a:fld>
@@ -5173,7 +5173,7 @@
           <a:bodyPr/>
           <a:lstStyle/>
           <a:p>
-            <a:fld id="{7EA5A982-ADBF-4889-A468-17388FA8A2B0}" type="slidenum">
+            <a:fld id="{AE4CF611-34A0-450C-B59C-69369A155398}" type="slidenum">
               <a:rPr lang="en-US"/>
               <a:t>‹#›</a:t>
             </a:fld>
@@ -5339,7 +5339,7 @@
           <a:bodyPr/>
           <a:lstStyle/>
           <a:p>
-            <a:fld id="{73498AEB-77BE-4E59-9296-DE187828965C}" type="slidenum">
+            <a:fld id="{14A0E342-C0CB-4027-B29E-CA8AD56FCE1B}" type="slidenum">
               <a:rPr lang="en-US"/>
               <a:t>‹#›</a:t>
             </a:fld>
